--- a/session5/exam-strategy/q5/q5_exam_strategy.pptx
+++ b/session5/exam-strategy/q5/q5_exam_strategy.pptx
@@ -3187,8 +3187,8 @@
         </p:nvSpPr>
         <p:spPr>
           <a:xfrm>
-            <a:off x="274320" y="685800"/>
-            <a:ext cx="6400800" cy="1645920"/>
+            <a:off x="274320" y="640080"/>
+            <a:ext cx="6583680" cy="1280160"/>
           </a:xfrm>
           <a:prstGeom prst="rect">
             <a:avLst/>
@@ -3196,13 +3196,13 @@
           <a:noFill/>
         </p:spPr>
         <p:txBody>
-          <a:bodyPr wrap="square">
+          <a:bodyPr wrap="square" tIns="0" bIns="0">
             <a:spAutoFit/>
           </a:bodyPr>
           <a:lstStyle/>
           <a:p>
             <a:pPr>
-              <a:defRPr sz="1100">
+              <a:defRPr sz="900">
                 <a:solidFill>
                   <a:srgbClr val="FFFFFF"/>
                 </a:solidFill>
@@ -3210,7 +3210,7 @@
               </a:defRPr>
             </a:pPr>
             <a:r>
-              <a:t>A developer wants to deploy an AWS Serverless Application Model (AWS SAM) application with the AWS SAM CLI. The developer is using the AWS CLI in an AWS Cloud9 environment for deployment and has run the sam build command to prepare the application for deployment. The next day, the developer connects to the same AWS Cloud9 environment and attempts to deploy the application. The sam deploy command returns the following error: Invalid (or missing) template file (path must be workspace-relative, ...</a:t>
+              <a:t>A developer wants to deploy an AWS Serverless Application Model (AWS SAM) application with the AWS SAM CLI. The developer is using the AWS CLI in an AWS Cloud9 environment for deployment and has run the sam build command to prepare the application for deployment. The next day, the developer connects to the same AWS Cloud9 environment and attempt...</a:t>
             </a:r>
           </a:p>
         </p:txBody>
@@ -3223,8 +3223,8 @@
         </p:nvSpPr>
         <p:spPr>
           <a:xfrm>
-            <a:off x="365760" y="2377440"/>
-            <a:ext cx="274320" cy="274320"/>
+            <a:off x="274320" y="2057400"/>
+            <a:ext cx="201168" cy="201168"/>
           </a:xfrm>
           <a:prstGeom prst="ellipse">
             <a:avLst/>
@@ -3255,7 +3255,7 @@
           <a:lstStyle/>
           <a:p>
             <a:pPr algn="ctr">
-              <a:defRPr sz="900" b="1">
+              <a:defRPr sz="700" b="1">
                 <a:solidFill>
                   <a:srgbClr val="FFFFFF"/>
                 </a:solidFill>
@@ -3275,8 +3275,8 @@
         </p:nvSpPr>
         <p:spPr>
           <a:xfrm>
-            <a:off x="777240" y="2377440"/>
-            <a:ext cx="5943600" cy="411480"/>
+            <a:off x="548640" y="2011680"/>
+            <a:ext cx="6400800" cy="736092"/>
           </a:xfrm>
           <a:prstGeom prst="rect">
             <a:avLst/>
@@ -3284,13 +3284,13 @@
           <a:noFill/>
         </p:spPr>
         <p:txBody>
-          <a:bodyPr wrap="square">
+          <a:bodyPr wrap="square" tIns="25400" bIns="0" lIns="0">
             <a:spAutoFit/>
           </a:bodyPr>
           <a:lstStyle/>
           <a:p>
             <a:pPr>
-              <a:defRPr sz="1000">
+              <a:defRPr sz="800">
                 <a:solidFill>
                   <a:srgbClr val="CCCCCC"/>
                 </a:solidFill>
@@ -3298,7 +3298,7 @@
               </a:defRPr>
             </a:pPr>
             <a:r>
-              <a:t>The template.yaml file is required, and it needs to be located in either the aws-sam subfolder or in the root of the cur</a:t>
+              <a:t>The template.yaml file is required, and it needs to be located in either the aws-sam subfolder or in</a:t>
             </a:r>
           </a:p>
         </p:txBody>
@@ -3311,8 +3311,8 @@
         </p:nvSpPr>
         <p:spPr>
           <a:xfrm>
-            <a:off x="365760" y="2834640"/>
-            <a:ext cx="274320" cy="274320"/>
+            <a:off x="274320" y="2811780"/>
+            <a:ext cx="201168" cy="201168"/>
           </a:xfrm>
           <a:prstGeom prst="ellipse">
             <a:avLst/>
@@ -3343,7 +3343,7 @@
           <a:lstStyle/>
           <a:p>
             <a:pPr algn="ctr">
-              <a:defRPr sz="900" b="1">
+              <a:defRPr sz="700" b="1">
                 <a:solidFill>
                   <a:srgbClr val="FFFFFF"/>
                 </a:solidFill>
@@ -3363,8 +3363,8 @@
         </p:nvSpPr>
         <p:spPr>
           <a:xfrm>
-            <a:off x="777240" y="2834640"/>
-            <a:ext cx="5943600" cy="411480"/>
+            <a:off x="548640" y="2766060"/>
+            <a:ext cx="6400800" cy="736092"/>
           </a:xfrm>
           <a:prstGeom prst="rect">
             <a:avLst/>
@@ -3372,13 +3372,13 @@
           <a:noFill/>
         </p:spPr>
         <p:txBody>
-          <a:bodyPr wrap="square">
+          <a:bodyPr wrap="square" tIns="25400" bIns="0" lIns="0">
             <a:spAutoFit/>
           </a:bodyPr>
           <a:lstStyle/>
           <a:p>
             <a:pPr>
-              <a:defRPr sz="1000">
+              <a:defRPr sz="800">
                 <a:solidFill>
                   <a:srgbClr val="CCCCCC"/>
                 </a:solidFill>
@@ -3386,7 +3386,7 @@
               </a:defRPr>
             </a:pPr>
             <a:r>
-              <a:t>The template.yaml file is required, and it needs to be located either in the aws-sam subfolder or in the root of the cur</a:t>
+              <a:t>The template.yaml file is required, and it needs to be located either in the aws-sam subfolder or in</a:t>
             </a:r>
           </a:p>
         </p:txBody>
@@ -3399,8 +3399,8 @@
         </p:nvSpPr>
         <p:spPr>
           <a:xfrm>
-            <a:off x="365760" y="3291840"/>
-            <a:ext cx="274320" cy="274320"/>
+            <a:off x="274320" y="3566160"/>
+            <a:ext cx="201168" cy="201168"/>
           </a:xfrm>
           <a:prstGeom prst="ellipse">
             <a:avLst/>
@@ -3431,7 +3431,7 @@
           <a:lstStyle/>
           <a:p>
             <a:pPr algn="ctr">
-              <a:defRPr sz="900" b="1">
+              <a:defRPr sz="700" b="1">
                 <a:solidFill>
                   <a:srgbClr val="FFFFFF"/>
                 </a:solidFill>
@@ -3451,8 +3451,8 @@
         </p:nvSpPr>
         <p:spPr>
           <a:xfrm>
-            <a:off x="777240" y="3291840"/>
-            <a:ext cx="5943600" cy="411480"/>
+            <a:off x="548640" y="3520440"/>
+            <a:ext cx="6400800" cy="736092"/>
           </a:xfrm>
           <a:prstGeom prst="rect">
             <a:avLst/>
@@ -3460,13 +3460,13 @@
           <a:noFill/>
         </p:spPr>
         <p:txBody>
-          <a:bodyPr wrap="square">
+          <a:bodyPr wrap="square" tIns="25400" bIns="0" lIns="0">
             <a:spAutoFit/>
           </a:bodyPr>
           <a:lstStyle/>
           <a:p>
             <a:pPr>
-              <a:defRPr sz="1000">
+              <a:defRPr sz="800">
                 <a:solidFill>
                   <a:srgbClr val="CCCCCC"/>
                 </a:solidFill>
@@ -3474,7 +3474,7 @@
               </a:defRPr>
             </a:pPr>
             <a:r>
-              <a:t>The developer needs to change the working directory to the root of the application that was created by sam build. By def</a:t>
+              <a:t>The developer needs to change the working directory to the root of the application that was created </a:t>
             </a:r>
           </a:p>
         </p:txBody>
@@ -3487,8 +3487,8 @@
         </p:nvSpPr>
         <p:spPr>
           <a:xfrm>
-            <a:off x="365760" y="3749039"/>
-            <a:ext cx="274320" cy="274320"/>
+            <a:off x="274320" y="4320540"/>
+            <a:ext cx="201168" cy="201168"/>
           </a:xfrm>
           <a:prstGeom prst="ellipse">
             <a:avLst/>
@@ -3519,7 +3519,7 @@
           <a:lstStyle/>
           <a:p>
             <a:pPr algn="ctr">
-              <a:defRPr sz="900" b="1">
+              <a:defRPr sz="700" b="1">
                 <a:solidFill>
                   <a:srgbClr val="FFFFFF"/>
                 </a:solidFill>
@@ -3539,8 +3539,8 @@
         </p:nvSpPr>
         <p:spPr>
           <a:xfrm>
-            <a:off x="777240" y="3749039"/>
-            <a:ext cx="5943600" cy="411480"/>
+            <a:off x="548640" y="4274820"/>
+            <a:ext cx="6400800" cy="736092"/>
           </a:xfrm>
           <a:prstGeom prst="rect">
             <a:avLst/>
@@ -3548,13 +3548,13 @@
           <a:noFill/>
         </p:spPr>
         <p:txBody>
-          <a:bodyPr wrap="square">
+          <a:bodyPr wrap="square" tIns="25400" bIns="0" lIns="0">
             <a:spAutoFit/>
           </a:bodyPr>
           <a:lstStyle/>
           <a:p>
             <a:pPr>
-              <a:defRPr sz="1000">
+              <a:defRPr sz="800">
                 <a:solidFill>
                   <a:srgbClr val="CCCCCC"/>
                 </a:solidFill>
@@ -3562,7 +3562,7 @@
               </a:defRPr>
             </a:pPr>
             <a:r>
-              <a:t>Because the sam build command completed successfully, the focus of problem resolution should be the location of the temp</a:t>
+              <a:t>Because the sam build command completed successfully, the focus of problem resolution should be the </a:t>
             </a:r>
           </a:p>
         </p:txBody>
@@ -3844,8 +3844,8 @@
         </p:blipFill>
         <p:spPr>
           <a:xfrm>
-            <a:off x="182880" y="914400"/>
-            <a:ext cx="3228638" cy="3840480"/>
+            <a:off x="182880" y="1185664"/>
+            <a:ext cx="5303520" cy="3297950"/>
           </a:xfrm>
           <a:prstGeom prst="rect">
             <a:avLst/>
@@ -3980,9 +3980,9 @@
           <a:p>
             <a:pPr>
               <a:spcAft>
-                <a:spcPts val="600"/>
+                <a:spcPts val="400"/>
               </a:spcAft>
-              <a:defRPr sz="900">
+              <a:defRPr sz="800">
                 <a:solidFill>
                   <a:srgbClr val="212121"/>
                 </a:solidFill>
@@ -3990,7 +3990,23 @@
               </a:defRPr>
             </a:pPr>
             <a:r>
-              <a:t>• The template.yaml file is required, and it needs to be located in either the aws-sam subfolder or in the root of the current working directory for the sam deploy command to succeed.</a:t>
+              <a:t>• The template.yaml file is required</a:t>
+            </a:r>
+          </a:p>
+          <a:p>
+            <a:pPr>
+              <a:spcAft>
+                <a:spcPts val="400"/>
+              </a:spcAft>
+              <a:defRPr sz="800">
+                <a:solidFill>
+                  <a:srgbClr val="212121"/>
+                </a:solidFill>
+                <a:latin typeface="Segoe UI"/>
+              </a:defRPr>
+            </a:pPr>
+            <a:r>
+              <a:t>• And it needs to be located in either the aws-sam subfolder or in the root of the current working directory for the sam deploy command to succeed</a:t>
             </a:r>
           </a:p>
         </p:txBody>
@@ -4169,8 +4185,8 @@
         </p:blipFill>
         <p:spPr>
           <a:xfrm>
-            <a:off x="182880" y="914400"/>
-            <a:ext cx="3228638" cy="3840480"/>
+            <a:off x="182880" y="1161114"/>
+            <a:ext cx="5303520" cy="3347051"/>
           </a:xfrm>
           <a:prstGeom prst="rect">
             <a:avLst/>
@@ -4305,9 +4321,9 @@
           <a:p>
             <a:pPr>
               <a:spcAft>
-                <a:spcPts val="600"/>
+                <a:spcPts val="400"/>
               </a:spcAft>
-              <a:defRPr sz="900">
+              <a:defRPr sz="800">
                 <a:solidFill>
                   <a:srgbClr val="212121"/>
                 </a:solidFill>
@@ -4315,7 +4331,23 @@
               </a:defRPr>
             </a:pPr>
             <a:r>
-              <a:t>• The template.yaml file is required, and it needs to be located either in the aws-sam subfolder or in the root of the current working directory for the sam deploy command to succeed.</a:t>
+              <a:t>• The template.yaml file is required</a:t>
+            </a:r>
+          </a:p>
+          <a:p>
+            <a:pPr>
+              <a:spcAft>
+                <a:spcPts val="400"/>
+              </a:spcAft>
+              <a:defRPr sz="800">
+                <a:solidFill>
+                  <a:srgbClr val="212121"/>
+                </a:solidFill>
+                <a:latin typeface="Segoe UI"/>
+              </a:defRPr>
+            </a:pPr>
+            <a:r>
+              <a:t>• And it needs to be located either in the aws-sam subfolder or in the root of the current working directory for the sam deploy command to succeed</a:t>
             </a:r>
           </a:p>
         </p:txBody>
@@ -4494,8 +4526,8 @@
         </p:blipFill>
         <p:spPr>
           <a:xfrm>
-            <a:off x="182880" y="914400"/>
-            <a:ext cx="3115683" cy="3840480"/>
+            <a:off x="182880" y="1063203"/>
+            <a:ext cx="5303520" cy="3542872"/>
           </a:xfrm>
           <a:prstGeom prst="rect">
             <a:avLst/>
@@ -4630,9 +4662,9 @@
           <a:p>
             <a:pPr>
               <a:spcAft>
-                <a:spcPts val="600"/>
+                <a:spcPts val="400"/>
               </a:spcAft>
-              <a:defRPr sz="900">
+              <a:defRPr sz="800">
                 <a:solidFill>
                   <a:srgbClr val="212121"/>
                 </a:solidFill>
@@ -4640,15 +4672,15 @@
               </a:defRPr>
             </a:pPr>
             <a:r>
-              <a:t>• The developer needs to change the working directory to the root of the application that was created by sam build.</a:t>
+              <a:t>• The developer needs to change the working directory to the root of the application that was created by sam build</a:t>
             </a:r>
           </a:p>
           <a:p>
             <a:pPr>
               <a:spcAft>
-                <a:spcPts val="600"/>
+                <a:spcPts val="400"/>
               </a:spcAft>
-              <a:defRPr sz="900">
+              <a:defRPr sz="800">
                 <a:solidFill>
                   <a:srgbClr val="212121"/>
                 </a:solidFill>
@@ -4656,39 +4688,7 @@
               </a:defRPr>
             </a:pPr>
             <a:r>
-              <a:t>• By default, sam deploy assumes that the current working directory is the project's root directory and tries to locate the template.</a:t>
-            </a:r>
-          </a:p>
-          <a:p>
-            <a:pPr>
-              <a:spcAft>
-                <a:spcPts val="600"/>
-              </a:spcAft>
-              <a:defRPr sz="900">
-                <a:solidFill>
-                  <a:srgbClr val="212121"/>
-                </a:solidFill>
-                <a:latin typeface="Segoe UI"/>
-              </a:defRPr>
-            </a:pPr>
-            <a:r>
-              <a:t>• yaml file either in the .</a:t>
-            </a:r>
-          </a:p>
-          <a:p>
-            <a:pPr>
-              <a:spcAft>
-                <a:spcPts val="600"/>
-              </a:spcAft>
-              <a:defRPr sz="900">
-                <a:solidFill>
-                  <a:srgbClr val="212121"/>
-                </a:solidFill>
-                <a:latin typeface="Segoe UI"/>
-              </a:defRPr>
-            </a:pPr>
-            <a:r>
-              <a:t>• aws-sam subfolder or in the root of the current working directory.</a:t>
+              <a:t>• By default, sam deploy assumes that the current working directory is the project's root directory and tries to locate the template.yaml file either in the .aws-sam subfolder or in the root of the current working directory</a:t>
             </a:r>
           </a:p>
         </p:txBody>
@@ -4867,8 +4867,8 @@
         </p:blipFill>
         <p:spPr>
           <a:xfrm>
-            <a:off x="182880" y="914400"/>
-            <a:ext cx="3238051" cy="3840480"/>
+            <a:off x="182880" y="1204267"/>
+            <a:ext cx="5303520" cy="3260745"/>
           </a:xfrm>
           <a:prstGeom prst="rect">
             <a:avLst/>
@@ -5003,9 +5003,9 @@
           <a:p>
             <a:pPr>
               <a:spcAft>
-                <a:spcPts val="600"/>
+                <a:spcPts val="400"/>
               </a:spcAft>
-              <a:defRPr sz="900">
+              <a:defRPr sz="800">
                 <a:solidFill>
                   <a:srgbClr val="212121"/>
                 </a:solidFill>
@@ -5013,15 +5013,15 @@
               </a:defRPr>
             </a:pPr>
             <a:r>
-              <a:t>• Because the sam build command completed successfully, the focus of problem resolution should be the location of the template.</a:t>
+              <a:t>• Because the sam build command completed successfully</a:t>
             </a:r>
           </a:p>
           <a:p>
             <a:pPr>
               <a:spcAft>
-                <a:spcPts val="600"/>
+                <a:spcPts val="400"/>
               </a:spcAft>
-              <a:defRPr sz="900">
+              <a:defRPr sz="800">
                 <a:solidFill>
                   <a:srgbClr val="212121"/>
                 </a:solidFill>
@@ -5029,7 +5029,7 @@
               </a:defRPr>
             </a:pPr>
             <a:r>
-              <a:t>• yaml file.</a:t>
+              <a:t>• The focus of problem resolution should be the location of the template.yaml file</a:t>
             </a:r>
           </a:p>
         </p:txBody>

--- a/session5/exam-strategy/q5/q5_exam_strategy.pptx
+++ b/session5/exam-strategy/q5/q5_exam_strategy.pptx
@@ -3187,8 +3187,8 @@
         </p:nvSpPr>
         <p:spPr>
           <a:xfrm>
-            <a:off x="274320" y="640080"/>
-            <a:ext cx="6583680" cy="1280160"/>
+            <a:off x="274320" y="685800"/>
+            <a:ext cx="6400800" cy="1645920"/>
           </a:xfrm>
           <a:prstGeom prst="rect">
             <a:avLst/>
@@ -3196,13 +3196,13 @@
           <a:noFill/>
         </p:spPr>
         <p:txBody>
-          <a:bodyPr wrap="square" tIns="0" bIns="0">
+          <a:bodyPr wrap="square">
             <a:spAutoFit/>
           </a:bodyPr>
           <a:lstStyle/>
           <a:p>
             <a:pPr>
-              <a:defRPr sz="900">
+              <a:defRPr sz="1100">
                 <a:solidFill>
                   <a:srgbClr val="FFFFFF"/>
                 </a:solidFill>
@@ -3210,7 +3210,7 @@
               </a:defRPr>
             </a:pPr>
             <a:r>
-              <a:t>A developer wants to deploy an AWS Serverless Application Model (AWS SAM) application with the AWS SAM CLI. The developer is using the AWS CLI in an AWS Cloud9 environment for deployment and has run the sam build command to prepare the application for deployment. The next day, the developer connects to the same AWS Cloud9 environment and attempt...</a:t>
+              <a:t>A developer wants to deploy an AWS Serverless Application Model (AWS SAM) application with the AWS SAM CLI. The developer is using the AWS CLI in an AWS Cloud9 environment for deployment and has run the sam build command to prepare the application for deployment. The next day, the developer connects to the same AWS Cloud9 environment and attempts to deploy the application. The sam deploy command returns the following error: Invalid (or missing) template file (path must be workspace-relative, ...</a:t>
             </a:r>
           </a:p>
         </p:txBody>
@@ -3223,8 +3223,8 @@
         </p:nvSpPr>
         <p:spPr>
           <a:xfrm>
-            <a:off x="274320" y="2057400"/>
-            <a:ext cx="201168" cy="201168"/>
+            <a:off x="365760" y="2377440"/>
+            <a:ext cx="274320" cy="274320"/>
           </a:xfrm>
           <a:prstGeom prst="ellipse">
             <a:avLst/>
@@ -3255,7 +3255,7 @@
           <a:lstStyle/>
           <a:p>
             <a:pPr algn="ctr">
-              <a:defRPr sz="700" b="1">
+              <a:defRPr sz="900" b="1">
                 <a:solidFill>
                   <a:srgbClr val="FFFFFF"/>
                 </a:solidFill>
@@ -3275,8 +3275,8 @@
         </p:nvSpPr>
         <p:spPr>
           <a:xfrm>
-            <a:off x="548640" y="2011680"/>
-            <a:ext cx="6400800" cy="736092"/>
+            <a:off x="777240" y="2377440"/>
+            <a:ext cx="5943600" cy="411480"/>
           </a:xfrm>
           <a:prstGeom prst="rect">
             <a:avLst/>
@@ -3284,13 +3284,13 @@
           <a:noFill/>
         </p:spPr>
         <p:txBody>
-          <a:bodyPr wrap="square" tIns="25400" bIns="0" lIns="0">
+          <a:bodyPr wrap="square">
             <a:spAutoFit/>
           </a:bodyPr>
           <a:lstStyle/>
           <a:p>
             <a:pPr>
-              <a:defRPr sz="800">
+              <a:defRPr sz="1000">
                 <a:solidFill>
                   <a:srgbClr val="CCCCCC"/>
                 </a:solidFill>
@@ -3298,7 +3298,7 @@
               </a:defRPr>
             </a:pPr>
             <a:r>
-              <a:t>The template.yaml file is required, and it needs to be located in either the aws-sam subfolder or in</a:t>
+              <a:t>The template.yaml file is required, and it needs to be located in either the aws-sam subfolder or in the root of the cur</a:t>
             </a:r>
           </a:p>
         </p:txBody>
@@ -3311,8 +3311,8 @@
         </p:nvSpPr>
         <p:spPr>
           <a:xfrm>
-            <a:off x="274320" y="2811780"/>
-            <a:ext cx="201168" cy="201168"/>
+            <a:off x="365760" y="2834640"/>
+            <a:ext cx="274320" cy="274320"/>
           </a:xfrm>
           <a:prstGeom prst="ellipse">
             <a:avLst/>
@@ -3343,7 +3343,7 @@
           <a:lstStyle/>
           <a:p>
             <a:pPr algn="ctr">
-              <a:defRPr sz="700" b="1">
+              <a:defRPr sz="900" b="1">
                 <a:solidFill>
                   <a:srgbClr val="FFFFFF"/>
                 </a:solidFill>
@@ -3363,8 +3363,8 @@
         </p:nvSpPr>
         <p:spPr>
           <a:xfrm>
-            <a:off x="548640" y="2766060"/>
-            <a:ext cx="6400800" cy="736092"/>
+            <a:off x="777240" y="2834640"/>
+            <a:ext cx="5943600" cy="411480"/>
           </a:xfrm>
           <a:prstGeom prst="rect">
             <a:avLst/>
@@ -3372,13 +3372,13 @@
           <a:noFill/>
         </p:spPr>
         <p:txBody>
-          <a:bodyPr wrap="square" tIns="25400" bIns="0" lIns="0">
+          <a:bodyPr wrap="square">
             <a:spAutoFit/>
           </a:bodyPr>
           <a:lstStyle/>
           <a:p>
             <a:pPr>
-              <a:defRPr sz="800">
+              <a:defRPr sz="1000">
                 <a:solidFill>
                   <a:srgbClr val="CCCCCC"/>
                 </a:solidFill>
@@ -3386,7 +3386,7 @@
               </a:defRPr>
             </a:pPr>
             <a:r>
-              <a:t>The template.yaml file is required, and it needs to be located either in the aws-sam subfolder or in</a:t>
+              <a:t>The template.yaml file is required, and it needs to be located either in the aws-sam subfolder or in the root of the cur</a:t>
             </a:r>
           </a:p>
         </p:txBody>
@@ -3399,8 +3399,8 @@
         </p:nvSpPr>
         <p:spPr>
           <a:xfrm>
-            <a:off x="274320" y="3566160"/>
-            <a:ext cx="201168" cy="201168"/>
+            <a:off x="365760" y="3291840"/>
+            <a:ext cx="274320" cy="274320"/>
           </a:xfrm>
           <a:prstGeom prst="ellipse">
             <a:avLst/>
@@ -3431,7 +3431,7 @@
           <a:lstStyle/>
           <a:p>
             <a:pPr algn="ctr">
-              <a:defRPr sz="700" b="1">
+              <a:defRPr sz="900" b="1">
                 <a:solidFill>
                   <a:srgbClr val="FFFFFF"/>
                 </a:solidFill>
@@ -3451,8 +3451,8 @@
         </p:nvSpPr>
         <p:spPr>
           <a:xfrm>
-            <a:off x="548640" y="3520440"/>
-            <a:ext cx="6400800" cy="736092"/>
+            <a:off x="777240" y="3291840"/>
+            <a:ext cx="5943600" cy="411480"/>
           </a:xfrm>
           <a:prstGeom prst="rect">
             <a:avLst/>
@@ -3460,13 +3460,13 @@
           <a:noFill/>
         </p:spPr>
         <p:txBody>
-          <a:bodyPr wrap="square" tIns="25400" bIns="0" lIns="0">
+          <a:bodyPr wrap="square">
             <a:spAutoFit/>
           </a:bodyPr>
           <a:lstStyle/>
           <a:p>
             <a:pPr>
-              <a:defRPr sz="800">
+              <a:defRPr sz="1000">
                 <a:solidFill>
                   <a:srgbClr val="CCCCCC"/>
                 </a:solidFill>
@@ -3474,7 +3474,7 @@
               </a:defRPr>
             </a:pPr>
             <a:r>
-              <a:t>The developer needs to change the working directory to the root of the application that was created </a:t>
+              <a:t>The developer needs to change the working directory to the root of the application that was created by sam build. By def</a:t>
             </a:r>
           </a:p>
         </p:txBody>
@@ -3487,8 +3487,8 @@
         </p:nvSpPr>
         <p:spPr>
           <a:xfrm>
-            <a:off x="274320" y="4320540"/>
-            <a:ext cx="201168" cy="201168"/>
+            <a:off x="365760" y="3749039"/>
+            <a:ext cx="274320" cy="274320"/>
           </a:xfrm>
           <a:prstGeom prst="ellipse">
             <a:avLst/>
@@ -3519,7 +3519,7 @@
           <a:lstStyle/>
           <a:p>
             <a:pPr algn="ctr">
-              <a:defRPr sz="700" b="1">
+              <a:defRPr sz="900" b="1">
                 <a:solidFill>
                   <a:srgbClr val="FFFFFF"/>
                 </a:solidFill>
@@ -3539,8 +3539,8 @@
         </p:nvSpPr>
         <p:spPr>
           <a:xfrm>
-            <a:off x="548640" y="4274820"/>
-            <a:ext cx="6400800" cy="736092"/>
+            <a:off x="777240" y="3749039"/>
+            <a:ext cx="5943600" cy="411480"/>
           </a:xfrm>
           <a:prstGeom prst="rect">
             <a:avLst/>
@@ -3548,13 +3548,13 @@
           <a:noFill/>
         </p:spPr>
         <p:txBody>
-          <a:bodyPr wrap="square" tIns="25400" bIns="0" lIns="0">
+          <a:bodyPr wrap="square">
             <a:spAutoFit/>
           </a:bodyPr>
           <a:lstStyle/>
           <a:p>
             <a:pPr>
-              <a:defRPr sz="800">
+              <a:defRPr sz="1000">
                 <a:solidFill>
                   <a:srgbClr val="CCCCCC"/>
                 </a:solidFill>
@@ -3562,7 +3562,7 @@
               </a:defRPr>
             </a:pPr>
             <a:r>
-              <a:t>Because the sam build command completed successfully, the focus of problem resolution should be the </a:t>
+              <a:t>Because the sam build command completed successfully, the focus of problem resolution should be the location of the temp</a:t>
             </a:r>
           </a:p>
         </p:txBody>
@@ -3844,8 +3844,8 @@
         </p:blipFill>
         <p:spPr>
           <a:xfrm>
-            <a:off x="182880" y="1185664"/>
-            <a:ext cx="5303520" cy="3297950"/>
+            <a:off x="182880" y="914400"/>
+            <a:ext cx="3624425" cy="3840480"/>
           </a:xfrm>
           <a:prstGeom prst="rect">
             <a:avLst/>
@@ -3980,9 +3980,9 @@
           <a:p>
             <a:pPr>
               <a:spcAft>
-                <a:spcPts val="400"/>
+                <a:spcPts val="600"/>
               </a:spcAft>
-              <a:defRPr sz="800">
+              <a:defRPr sz="900">
                 <a:solidFill>
                   <a:srgbClr val="212121"/>
                 </a:solidFill>
@@ -3990,23 +3990,7 @@
               </a:defRPr>
             </a:pPr>
             <a:r>
-              <a:t>• The template.yaml file is required</a:t>
-            </a:r>
-          </a:p>
-          <a:p>
-            <a:pPr>
-              <a:spcAft>
-                <a:spcPts val="400"/>
-              </a:spcAft>
-              <a:defRPr sz="800">
-                <a:solidFill>
-                  <a:srgbClr val="212121"/>
-                </a:solidFill>
-                <a:latin typeface="Segoe UI"/>
-              </a:defRPr>
-            </a:pPr>
-            <a:r>
-              <a:t>• And it needs to be located in either the aws-sam subfolder or in the root of the current working directory for the sam deploy command to succeed</a:t>
+              <a:t>• The template.yaml file is required, and it needs to be located in either the aws-sam subfolder or in the root of the current working directory for the sam deploy command to succeed.</a:t>
             </a:r>
           </a:p>
         </p:txBody>
@@ -4185,8 +4169,8 @@
         </p:blipFill>
         <p:spPr>
           <a:xfrm>
-            <a:off x="182880" y="1161114"/>
-            <a:ext cx="5303520" cy="3347051"/>
+            <a:off x="182880" y="914400"/>
+            <a:ext cx="3628834" cy="3840480"/>
           </a:xfrm>
           <a:prstGeom prst="rect">
             <a:avLst/>
@@ -4321,9 +4305,9 @@
           <a:p>
             <a:pPr>
               <a:spcAft>
-                <a:spcPts val="400"/>
+                <a:spcPts val="600"/>
               </a:spcAft>
-              <a:defRPr sz="800">
+              <a:defRPr sz="900">
                 <a:solidFill>
                   <a:srgbClr val="212121"/>
                 </a:solidFill>
@@ -4331,23 +4315,7 @@
               </a:defRPr>
             </a:pPr>
             <a:r>
-              <a:t>• The template.yaml file is required</a:t>
-            </a:r>
-          </a:p>
-          <a:p>
-            <a:pPr>
-              <a:spcAft>
-                <a:spcPts val="400"/>
-              </a:spcAft>
-              <a:defRPr sz="800">
-                <a:solidFill>
-                  <a:srgbClr val="212121"/>
-                </a:solidFill>
-                <a:latin typeface="Segoe UI"/>
-              </a:defRPr>
-            </a:pPr>
-            <a:r>
-              <a:t>• And it needs to be located either in the aws-sam subfolder or in the root of the current working directory for the sam deploy command to succeed</a:t>
+              <a:t>• The template.yaml file is required, and it needs to be located either in the aws-sam subfolder or in the root of the current working directory for the sam deploy command to succeed.</a:t>
             </a:r>
           </a:p>
         </p:txBody>
@@ -4526,8 +4494,8 @@
         </p:blipFill>
         <p:spPr>
           <a:xfrm>
-            <a:off x="182880" y="1063203"/>
-            <a:ext cx="5303520" cy="3542872"/>
+            <a:off x="182880" y="914400"/>
+            <a:ext cx="5212737" cy="3840480"/>
           </a:xfrm>
           <a:prstGeom prst="rect">
             <a:avLst/>
@@ -4662,9 +4630,9 @@
           <a:p>
             <a:pPr>
               <a:spcAft>
-                <a:spcPts val="400"/>
+                <a:spcPts val="600"/>
               </a:spcAft>
-              <a:defRPr sz="800">
+              <a:defRPr sz="900">
                 <a:solidFill>
                   <a:srgbClr val="212121"/>
                 </a:solidFill>
@@ -4672,15 +4640,15 @@
               </a:defRPr>
             </a:pPr>
             <a:r>
-              <a:t>• The developer needs to change the working directory to the root of the application that was created by sam build</a:t>
+              <a:t>• The developer needs to change the working directory to the root of the application that was created by sam build.</a:t>
             </a:r>
           </a:p>
           <a:p>
             <a:pPr>
               <a:spcAft>
-                <a:spcPts val="400"/>
+                <a:spcPts val="600"/>
               </a:spcAft>
-              <a:defRPr sz="800">
+              <a:defRPr sz="900">
                 <a:solidFill>
                   <a:srgbClr val="212121"/>
                 </a:solidFill>
@@ -4688,7 +4656,39 @@
               </a:defRPr>
             </a:pPr>
             <a:r>
-              <a:t>• By default, sam deploy assumes that the current working directory is the project's root directory and tries to locate the template.yaml file either in the .aws-sam subfolder or in the root of the current working directory</a:t>
+              <a:t>• By default, sam deploy assumes that the current working directory is the project's root directory and tries to locate the template.</a:t>
+            </a:r>
+          </a:p>
+          <a:p>
+            <a:pPr>
+              <a:spcAft>
+                <a:spcPts val="600"/>
+              </a:spcAft>
+              <a:defRPr sz="900">
+                <a:solidFill>
+                  <a:srgbClr val="212121"/>
+                </a:solidFill>
+                <a:latin typeface="Segoe UI"/>
+              </a:defRPr>
+            </a:pPr>
+            <a:r>
+              <a:t>• yaml file either in the .</a:t>
+            </a:r>
+          </a:p>
+          <a:p>
+            <a:pPr>
+              <a:spcAft>
+                <a:spcPts val="600"/>
+              </a:spcAft>
+              <a:defRPr sz="900">
+                <a:solidFill>
+                  <a:srgbClr val="212121"/>
+                </a:solidFill>
+                <a:latin typeface="Segoe UI"/>
+              </a:defRPr>
+            </a:pPr>
+            <a:r>
+              <a:t>• aws-sam subfolder or in the root of the current working directory.</a:t>
             </a:r>
           </a:p>
         </p:txBody>
@@ -4867,8 +4867,8 @@
         </p:blipFill>
         <p:spPr>
           <a:xfrm>
-            <a:off x="182880" y="1204267"/>
-            <a:ext cx="5303520" cy="3260745"/>
+            <a:off x="182880" y="1607146"/>
+            <a:ext cx="5303520" cy="2454986"/>
           </a:xfrm>
           <a:prstGeom prst="rect">
             <a:avLst/>
@@ -5003,9 +5003,9 @@
           <a:p>
             <a:pPr>
               <a:spcAft>
-                <a:spcPts val="400"/>
+                <a:spcPts val="600"/>
               </a:spcAft>
-              <a:defRPr sz="800">
+              <a:defRPr sz="900">
                 <a:solidFill>
                   <a:srgbClr val="212121"/>
                 </a:solidFill>
@@ -5013,15 +5013,15 @@
               </a:defRPr>
             </a:pPr>
             <a:r>
-              <a:t>• Because the sam build command completed successfully</a:t>
+              <a:t>• Because the sam build command completed successfully, the focus of problem resolution should be the location of the template.</a:t>
             </a:r>
           </a:p>
           <a:p>
             <a:pPr>
               <a:spcAft>
-                <a:spcPts val="400"/>
+                <a:spcPts val="600"/>
               </a:spcAft>
-              <a:defRPr sz="800">
+              <a:defRPr sz="900">
                 <a:solidFill>
                   <a:srgbClr val="212121"/>
                 </a:solidFill>
@@ -5029,7 +5029,7 @@
               </a:defRPr>
             </a:pPr>
             <a:r>
-              <a:t>• The focus of problem resolution should be the location of the template.yaml file</a:t>
+              <a:t>• yaml file.</a:t>
             </a:r>
           </a:p>
         </p:txBody>
